--- a/public/videos/repositories/hikkoshi-hikaku/hikkoshi-hikaku-tech-preview.pptx
+++ b/public/videos/repositories/hikkoshi-hikaku/hikkoshi-hikaku-tech-preview.pptx
@@ -134,7 +134,7 @@
           <p:cNvPr id="2" name="タイトル 1">
             <a:extLst>
               <a:ext uri="{FF2B5EF4-FFF2-40B4-BE49-F238E27FC236}">
-                <a16:creationId xmlns:a16="http://schemas.microsoft.com/office/drawing/2014/main" id="{095DFB5E-5836-0BA4-FE69-A158B5D79A37}"/>
+                <a16:creationId xmlns:a16="http://schemas.microsoft.com/office/drawing/2014/main" id="{B7E47C89-4DD8-1A58-62C0-9E358E76CB45}"/>
               </a:ext>
             </a:extLst>
           </p:cNvPr>
@@ -171,7 +171,7 @@
           <p:cNvPr id="3" name="字幕 2">
             <a:extLst>
               <a:ext uri="{FF2B5EF4-FFF2-40B4-BE49-F238E27FC236}">
-                <a16:creationId xmlns:a16="http://schemas.microsoft.com/office/drawing/2014/main" id="{FFB46A51-DB6F-5AC7-46AE-13E33AE4BAEB}"/>
+                <a16:creationId xmlns:a16="http://schemas.microsoft.com/office/drawing/2014/main" id="{EFFC4FFC-8498-DF8B-1A0E-3918B9C11F36}"/>
               </a:ext>
             </a:extLst>
           </p:cNvPr>
@@ -241,7 +241,7 @@
           <p:cNvPr id="4" name="日付プレースホルダー 3">
             <a:extLst>
               <a:ext uri="{FF2B5EF4-FFF2-40B4-BE49-F238E27FC236}">
-                <a16:creationId xmlns:a16="http://schemas.microsoft.com/office/drawing/2014/main" id="{A80DAC23-CD1C-BAEF-2D64-DDEE188435D6}"/>
+                <a16:creationId xmlns:a16="http://schemas.microsoft.com/office/drawing/2014/main" id="{CCE77A90-7CCB-FDC2-20F3-E4C1646C12C1}"/>
               </a:ext>
             </a:extLst>
           </p:cNvPr>
@@ -257,7 +257,7 @@
           <a:bodyPr/>
           <a:lstStyle/>
           <a:p>
-            <a:fld id="{8A6C07D3-D116-4840-9A4E-BC787B9BC9D4}" type="datetimeFigureOut">
+            <a:fld id="{E138AC11-6CA7-4E42-AF3F-4757D411B95C}" type="datetimeFigureOut">
               <a:rPr kumimoji="1" lang="ja-JP" altLang="en-US" smtClean="0"/>
               <a:t>2026/7/30</a:t>
             </a:fld>
@@ -270,7 +270,7 @@
           <p:cNvPr id="5" name="フッター プレースホルダー 4">
             <a:extLst>
               <a:ext uri="{FF2B5EF4-FFF2-40B4-BE49-F238E27FC236}">
-                <a16:creationId xmlns:a16="http://schemas.microsoft.com/office/drawing/2014/main" id="{C6A1F9FB-95BC-283A-4D48-9AE371FECE53}"/>
+                <a16:creationId xmlns:a16="http://schemas.microsoft.com/office/drawing/2014/main" id="{70017979-8673-0D47-5608-99FEB97C53C6}"/>
               </a:ext>
             </a:extLst>
           </p:cNvPr>
@@ -295,7 +295,7 @@
           <p:cNvPr id="6" name="スライド番号プレースホルダー 5">
             <a:extLst>
               <a:ext uri="{FF2B5EF4-FFF2-40B4-BE49-F238E27FC236}">
-                <a16:creationId xmlns:a16="http://schemas.microsoft.com/office/drawing/2014/main" id="{E22E77E7-3A84-C544-0701-AD0DC51B2993}"/>
+                <a16:creationId xmlns:a16="http://schemas.microsoft.com/office/drawing/2014/main" id="{2EBBA2F3-C792-488A-A894-9032D34308B5}"/>
               </a:ext>
             </a:extLst>
           </p:cNvPr>
@@ -311,7 +311,7 @@
           <a:bodyPr/>
           <a:lstStyle/>
           <a:p>
-            <a:fld id="{AF5F013A-3699-44BF-A632-E4794C1D1B6C}" type="slidenum">
+            <a:fld id="{6205F9B0-C1B4-44DD-92DB-84D5FAD413AE}" type="slidenum">
               <a:rPr kumimoji="1" lang="ja-JP" altLang="en-US" smtClean="0"/>
               <a:t>‹#›</a:t>
             </a:fld>
@@ -322,7 +322,7 @@
     </p:spTree>
     <p:extLst>
       <p:ext uri="{BB962C8B-B14F-4D97-AF65-F5344CB8AC3E}">
-        <p14:creationId xmlns:p14="http://schemas.microsoft.com/office/powerpoint/2010/main" val="1786453516"/>
+        <p14:creationId xmlns:p14="http://schemas.microsoft.com/office/powerpoint/2010/main" val="511291766"/>
       </p:ext>
     </p:extLst>
   </p:cSld>
@@ -354,7 +354,7 @@
           <p:cNvPr id="2" name="タイトル 1">
             <a:extLst>
               <a:ext uri="{FF2B5EF4-FFF2-40B4-BE49-F238E27FC236}">
-                <a16:creationId xmlns:a16="http://schemas.microsoft.com/office/drawing/2014/main" id="{0E106FE8-ECF5-0479-C0BF-A7C797B47C13}"/>
+                <a16:creationId xmlns:a16="http://schemas.microsoft.com/office/drawing/2014/main" id="{61368741-FD65-059F-6401-436EC3FD8E8B}"/>
               </a:ext>
             </a:extLst>
           </p:cNvPr>
@@ -382,7 +382,7 @@
           <p:cNvPr id="3" name="縦書きテキスト プレースホルダー 2">
             <a:extLst>
               <a:ext uri="{FF2B5EF4-FFF2-40B4-BE49-F238E27FC236}">
-                <a16:creationId xmlns:a16="http://schemas.microsoft.com/office/drawing/2014/main" id="{87D4B8DB-2CBB-17E4-61C8-26182BA59F48}"/>
+                <a16:creationId xmlns:a16="http://schemas.microsoft.com/office/drawing/2014/main" id="{62C75D3E-9A83-DEFC-0BAB-B35200759AA0}"/>
               </a:ext>
             </a:extLst>
           </p:cNvPr>
@@ -471,7 +471,7 @@
           <p:cNvPr id="4" name="日付プレースホルダー 3">
             <a:extLst>
               <a:ext uri="{FF2B5EF4-FFF2-40B4-BE49-F238E27FC236}">
-                <a16:creationId xmlns:a16="http://schemas.microsoft.com/office/drawing/2014/main" id="{0E50FD52-C0F1-4C02-C06E-FC6EE1E4A30D}"/>
+                <a16:creationId xmlns:a16="http://schemas.microsoft.com/office/drawing/2014/main" id="{3C314582-1BBE-C3D0-634B-A48BF522698C}"/>
               </a:ext>
             </a:extLst>
           </p:cNvPr>
@@ -487,7 +487,7 @@
           <a:bodyPr/>
           <a:lstStyle/>
           <a:p>
-            <a:fld id="{8A6C07D3-D116-4840-9A4E-BC787B9BC9D4}" type="datetimeFigureOut">
+            <a:fld id="{E138AC11-6CA7-4E42-AF3F-4757D411B95C}" type="datetimeFigureOut">
               <a:rPr kumimoji="1" lang="ja-JP" altLang="en-US" smtClean="0"/>
               <a:t>2026/7/30</a:t>
             </a:fld>
@@ -500,7 +500,7 @@
           <p:cNvPr id="5" name="フッター プレースホルダー 4">
             <a:extLst>
               <a:ext uri="{FF2B5EF4-FFF2-40B4-BE49-F238E27FC236}">
-                <a16:creationId xmlns:a16="http://schemas.microsoft.com/office/drawing/2014/main" id="{83925B05-13DC-3494-CFE8-342FBC65FECE}"/>
+                <a16:creationId xmlns:a16="http://schemas.microsoft.com/office/drawing/2014/main" id="{3D9F8A48-253F-455E-45F9-DE332A7C0A12}"/>
               </a:ext>
             </a:extLst>
           </p:cNvPr>
@@ -525,7 +525,7 @@
           <p:cNvPr id="6" name="スライド番号プレースホルダー 5">
             <a:extLst>
               <a:ext uri="{FF2B5EF4-FFF2-40B4-BE49-F238E27FC236}">
-                <a16:creationId xmlns:a16="http://schemas.microsoft.com/office/drawing/2014/main" id="{CEB25244-9D03-0828-E5FD-1A3FFCFA350A}"/>
+                <a16:creationId xmlns:a16="http://schemas.microsoft.com/office/drawing/2014/main" id="{5E07BFC4-EA11-669C-6A9A-F97B58DB09E0}"/>
               </a:ext>
             </a:extLst>
           </p:cNvPr>
@@ -541,7 +541,7 @@
           <a:bodyPr/>
           <a:lstStyle/>
           <a:p>
-            <a:fld id="{AF5F013A-3699-44BF-A632-E4794C1D1B6C}" type="slidenum">
+            <a:fld id="{6205F9B0-C1B4-44DD-92DB-84D5FAD413AE}" type="slidenum">
               <a:rPr kumimoji="1" lang="ja-JP" altLang="en-US" smtClean="0"/>
               <a:t>‹#›</a:t>
             </a:fld>
@@ -552,7 +552,7 @@
     </p:spTree>
     <p:extLst>
       <p:ext uri="{BB962C8B-B14F-4D97-AF65-F5344CB8AC3E}">
-        <p14:creationId xmlns:p14="http://schemas.microsoft.com/office/powerpoint/2010/main" val="3303007273"/>
+        <p14:creationId xmlns:p14="http://schemas.microsoft.com/office/powerpoint/2010/main" val="840051932"/>
       </p:ext>
     </p:extLst>
   </p:cSld>
@@ -584,7 +584,7 @@
           <p:cNvPr id="2" name="縦書きタイトル 1">
             <a:extLst>
               <a:ext uri="{FF2B5EF4-FFF2-40B4-BE49-F238E27FC236}">
-                <a16:creationId xmlns:a16="http://schemas.microsoft.com/office/drawing/2014/main" id="{00BC3882-8B79-E8EE-2A45-AFCFD6A14747}"/>
+                <a16:creationId xmlns:a16="http://schemas.microsoft.com/office/drawing/2014/main" id="{EB88055B-A35D-7D12-B9E6-5FD4DD5C039B}"/>
               </a:ext>
             </a:extLst>
           </p:cNvPr>
@@ -617,7 +617,7 @@
           <p:cNvPr id="3" name="縦書きテキスト プレースホルダー 2">
             <a:extLst>
               <a:ext uri="{FF2B5EF4-FFF2-40B4-BE49-F238E27FC236}">
-                <a16:creationId xmlns:a16="http://schemas.microsoft.com/office/drawing/2014/main" id="{80EB9095-5022-28D7-B49C-028C1499627D}"/>
+                <a16:creationId xmlns:a16="http://schemas.microsoft.com/office/drawing/2014/main" id="{A1B040D6-9B47-D9F7-A857-210D66488764}"/>
               </a:ext>
             </a:extLst>
           </p:cNvPr>
@@ -711,7 +711,7 @@
           <p:cNvPr id="4" name="日付プレースホルダー 3">
             <a:extLst>
               <a:ext uri="{FF2B5EF4-FFF2-40B4-BE49-F238E27FC236}">
-                <a16:creationId xmlns:a16="http://schemas.microsoft.com/office/drawing/2014/main" id="{DCC47AF5-00DA-2332-BD8D-9589B2DFB896}"/>
+                <a16:creationId xmlns:a16="http://schemas.microsoft.com/office/drawing/2014/main" id="{6893F370-8BAE-50DD-69E3-62AD2E4EE9D3}"/>
               </a:ext>
             </a:extLst>
           </p:cNvPr>
@@ -727,7 +727,7 @@
           <a:bodyPr/>
           <a:lstStyle/>
           <a:p>
-            <a:fld id="{8A6C07D3-D116-4840-9A4E-BC787B9BC9D4}" type="datetimeFigureOut">
+            <a:fld id="{E138AC11-6CA7-4E42-AF3F-4757D411B95C}" type="datetimeFigureOut">
               <a:rPr kumimoji="1" lang="ja-JP" altLang="en-US" smtClean="0"/>
               <a:t>2026/7/30</a:t>
             </a:fld>
@@ -740,7 +740,7 @@
           <p:cNvPr id="5" name="フッター プレースホルダー 4">
             <a:extLst>
               <a:ext uri="{FF2B5EF4-FFF2-40B4-BE49-F238E27FC236}">
-                <a16:creationId xmlns:a16="http://schemas.microsoft.com/office/drawing/2014/main" id="{14EB6A38-84D4-D39B-FFD1-0EDA0C038F80}"/>
+                <a16:creationId xmlns:a16="http://schemas.microsoft.com/office/drawing/2014/main" id="{F74FE7B7-4B62-44D2-ADCD-B6DCD45FA8E2}"/>
               </a:ext>
             </a:extLst>
           </p:cNvPr>
@@ -765,7 +765,7 @@
           <p:cNvPr id="6" name="スライド番号プレースホルダー 5">
             <a:extLst>
               <a:ext uri="{FF2B5EF4-FFF2-40B4-BE49-F238E27FC236}">
-                <a16:creationId xmlns:a16="http://schemas.microsoft.com/office/drawing/2014/main" id="{29E9C15F-DB63-8335-3549-A0C57B46CA47}"/>
+                <a16:creationId xmlns:a16="http://schemas.microsoft.com/office/drawing/2014/main" id="{67357873-AB5F-EA06-C0F8-CCE2D103EF43}"/>
               </a:ext>
             </a:extLst>
           </p:cNvPr>
@@ -781,7 +781,7 @@
           <a:bodyPr/>
           <a:lstStyle/>
           <a:p>
-            <a:fld id="{AF5F013A-3699-44BF-A632-E4794C1D1B6C}" type="slidenum">
+            <a:fld id="{6205F9B0-C1B4-44DD-92DB-84D5FAD413AE}" type="slidenum">
               <a:rPr kumimoji="1" lang="ja-JP" altLang="en-US" smtClean="0"/>
               <a:t>‹#›</a:t>
             </a:fld>
@@ -792,7 +792,7 @@
     </p:spTree>
     <p:extLst>
       <p:ext uri="{BB962C8B-B14F-4D97-AF65-F5344CB8AC3E}">
-        <p14:creationId xmlns:p14="http://schemas.microsoft.com/office/powerpoint/2010/main" val="958683834"/>
+        <p14:creationId xmlns:p14="http://schemas.microsoft.com/office/powerpoint/2010/main" val="2224078890"/>
       </p:ext>
     </p:extLst>
   </p:cSld>
@@ -824,7 +824,7 @@
           <p:cNvPr id="2" name="タイトル 1">
             <a:extLst>
               <a:ext uri="{FF2B5EF4-FFF2-40B4-BE49-F238E27FC236}">
-                <a16:creationId xmlns:a16="http://schemas.microsoft.com/office/drawing/2014/main" id="{F75FF85B-8F92-FA77-0A1A-66D196416D5C}"/>
+                <a16:creationId xmlns:a16="http://schemas.microsoft.com/office/drawing/2014/main" id="{D8D2F640-648E-847F-97A7-08273B77F0D8}"/>
               </a:ext>
             </a:extLst>
           </p:cNvPr>
@@ -852,7 +852,7 @@
           <p:cNvPr id="3" name="コンテンツ プレースホルダー 2">
             <a:extLst>
               <a:ext uri="{FF2B5EF4-FFF2-40B4-BE49-F238E27FC236}">
-                <a16:creationId xmlns:a16="http://schemas.microsoft.com/office/drawing/2014/main" id="{E4059EC2-B9F3-FD00-06DE-DDEF1B63BFFC}"/>
+                <a16:creationId xmlns:a16="http://schemas.microsoft.com/office/drawing/2014/main" id="{F84B49AE-5887-2127-9FBC-E7377C87B083}"/>
               </a:ext>
             </a:extLst>
           </p:cNvPr>
@@ -941,7 +941,7 @@
           <p:cNvPr id="4" name="日付プレースホルダー 3">
             <a:extLst>
               <a:ext uri="{FF2B5EF4-FFF2-40B4-BE49-F238E27FC236}">
-                <a16:creationId xmlns:a16="http://schemas.microsoft.com/office/drawing/2014/main" id="{0DF9F778-22C7-D5BB-B470-B9A6A0B64FD1}"/>
+                <a16:creationId xmlns:a16="http://schemas.microsoft.com/office/drawing/2014/main" id="{F2334FCB-D633-2E8D-0C89-67380DA74BFC}"/>
               </a:ext>
             </a:extLst>
           </p:cNvPr>
@@ -957,7 +957,7 @@
           <a:bodyPr/>
           <a:lstStyle/>
           <a:p>
-            <a:fld id="{8A6C07D3-D116-4840-9A4E-BC787B9BC9D4}" type="datetimeFigureOut">
+            <a:fld id="{E138AC11-6CA7-4E42-AF3F-4757D411B95C}" type="datetimeFigureOut">
               <a:rPr kumimoji="1" lang="ja-JP" altLang="en-US" smtClean="0"/>
               <a:t>2026/7/30</a:t>
             </a:fld>
@@ -970,7 +970,7 @@
           <p:cNvPr id="5" name="フッター プレースホルダー 4">
             <a:extLst>
               <a:ext uri="{FF2B5EF4-FFF2-40B4-BE49-F238E27FC236}">
-                <a16:creationId xmlns:a16="http://schemas.microsoft.com/office/drawing/2014/main" id="{AF18E77A-E7DF-532A-EBC8-5954CE118AA7}"/>
+                <a16:creationId xmlns:a16="http://schemas.microsoft.com/office/drawing/2014/main" id="{6FC1B088-8D33-F757-6A64-BBE45223AFB5}"/>
               </a:ext>
             </a:extLst>
           </p:cNvPr>
@@ -995,7 +995,7 @@
           <p:cNvPr id="6" name="スライド番号プレースホルダー 5">
             <a:extLst>
               <a:ext uri="{FF2B5EF4-FFF2-40B4-BE49-F238E27FC236}">
-                <a16:creationId xmlns:a16="http://schemas.microsoft.com/office/drawing/2014/main" id="{98743E71-50FC-E01F-1C09-57E7FA2BBF9D}"/>
+                <a16:creationId xmlns:a16="http://schemas.microsoft.com/office/drawing/2014/main" id="{35066EAF-B997-DE8B-8DBC-C270FBD2F26C}"/>
               </a:ext>
             </a:extLst>
           </p:cNvPr>
@@ -1011,7 +1011,7 @@
           <a:bodyPr/>
           <a:lstStyle/>
           <a:p>
-            <a:fld id="{AF5F013A-3699-44BF-A632-E4794C1D1B6C}" type="slidenum">
+            <a:fld id="{6205F9B0-C1B4-44DD-92DB-84D5FAD413AE}" type="slidenum">
               <a:rPr kumimoji="1" lang="ja-JP" altLang="en-US" smtClean="0"/>
               <a:t>‹#›</a:t>
             </a:fld>
@@ -1022,7 +1022,7 @@
     </p:spTree>
     <p:extLst>
       <p:ext uri="{BB962C8B-B14F-4D97-AF65-F5344CB8AC3E}">
-        <p14:creationId xmlns:p14="http://schemas.microsoft.com/office/powerpoint/2010/main" val="1438426740"/>
+        <p14:creationId xmlns:p14="http://schemas.microsoft.com/office/powerpoint/2010/main" val="3101272145"/>
       </p:ext>
     </p:extLst>
   </p:cSld>
@@ -1054,7 +1054,7 @@
           <p:cNvPr id="2" name="タイトル 1">
             <a:extLst>
               <a:ext uri="{FF2B5EF4-FFF2-40B4-BE49-F238E27FC236}">
-                <a16:creationId xmlns:a16="http://schemas.microsoft.com/office/drawing/2014/main" id="{2A43A97D-C196-8074-22B0-233E81D8E9D1}"/>
+                <a16:creationId xmlns:a16="http://schemas.microsoft.com/office/drawing/2014/main" id="{39081A85-9BFE-BF9C-7412-D2914708DA78}"/>
               </a:ext>
             </a:extLst>
           </p:cNvPr>
@@ -1091,7 +1091,7 @@
           <p:cNvPr id="3" name="テキスト プレースホルダー 2">
             <a:extLst>
               <a:ext uri="{FF2B5EF4-FFF2-40B4-BE49-F238E27FC236}">
-                <a16:creationId xmlns:a16="http://schemas.microsoft.com/office/drawing/2014/main" id="{274F9796-0E97-F0D5-5E50-335D451F60F0}"/>
+                <a16:creationId xmlns:a16="http://schemas.microsoft.com/office/drawing/2014/main" id="{350491AA-B600-C1F2-A712-86F49EBE2F98}"/>
               </a:ext>
             </a:extLst>
           </p:cNvPr>
@@ -1216,7 +1216,7 @@
           <p:cNvPr id="4" name="日付プレースホルダー 3">
             <a:extLst>
               <a:ext uri="{FF2B5EF4-FFF2-40B4-BE49-F238E27FC236}">
-                <a16:creationId xmlns:a16="http://schemas.microsoft.com/office/drawing/2014/main" id="{06D35B01-3C7F-20F1-023D-2448F833B5BD}"/>
+                <a16:creationId xmlns:a16="http://schemas.microsoft.com/office/drawing/2014/main" id="{2193E1D7-E825-049F-E0DA-9C5F63F02A91}"/>
               </a:ext>
             </a:extLst>
           </p:cNvPr>
@@ -1232,7 +1232,7 @@
           <a:bodyPr/>
           <a:lstStyle/>
           <a:p>
-            <a:fld id="{8A6C07D3-D116-4840-9A4E-BC787B9BC9D4}" type="datetimeFigureOut">
+            <a:fld id="{E138AC11-6CA7-4E42-AF3F-4757D411B95C}" type="datetimeFigureOut">
               <a:rPr kumimoji="1" lang="ja-JP" altLang="en-US" smtClean="0"/>
               <a:t>2026/7/30</a:t>
             </a:fld>
@@ -1245,7 +1245,7 @@
           <p:cNvPr id="5" name="フッター プレースホルダー 4">
             <a:extLst>
               <a:ext uri="{FF2B5EF4-FFF2-40B4-BE49-F238E27FC236}">
-                <a16:creationId xmlns:a16="http://schemas.microsoft.com/office/drawing/2014/main" id="{F925F063-D78E-A299-17E0-1B269830E7D3}"/>
+                <a16:creationId xmlns:a16="http://schemas.microsoft.com/office/drawing/2014/main" id="{B95A10CF-E054-1FD8-CA37-0A0CBB2ECE45}"/>
               </a:ext>
             </a:extLst>
           </p:cNvPr>
@@ -1270,7 +1270,7 @@
           <p:cNvPr id="6" name="スライド番号プレースホルダー 5">
             <a:extLst>
               <a:ext uri="{FF2B5EF4-FFF2-40B4-BE49-F238E27FC236}">
-                <a16:creationId xmlns:a16="http://schemas.microsoft.com/office/drawing/2014/main" id="{DC672DA0-1219-84BC-5F98-B0B92B12FD2B}"/>
+                <a16:creationId xmlns:a16="http://schemas.microsoft.com/office/drawing/2014/main" id="{4156000D-D2C2-D4FF-0C0B-1AF6542BED9C}"/>
               </a:ext>
             </a:extLst>
           </p:cNvPr>
@@ -1286,7 +1286,7 @@
           <a:bodyPr/>
           <a:lstStyle/>
           <a:p>
-            <a:fld id="{AF5F013A-3699-44BF-A632-E4794C1D1B6C}" type="slidenum">
+            <a:fld id="{6205F9B0-C1B4-44DD-92DB-84D5FAD413AE}" type="slidenum">
               <a:rPr kumimoji="1" lang="ja-JP" altLang="en-US" smtClean="0"/>
               <a:t>‹#›</a:t>
             </a:fld>
@@ -1297,7 +1297,7 @@
     </p:spTree>
     <p:extLst>
       <p:ext uri="{BB962C8B-B14F-4D97-AF65-F5344CB8AC3E}">
-        <p14:creationId xmlns:p14="http://schemas.microsoft.com/office/powerpoint/2010/main" val="2285873232"/>
+        <p14:creationId xmlns:p14="http://schemas.microsoft.com/office/powerpoint/2010/main" val="1042745878"/>
       </p:ext>
     </p:extLst>
   </p:cSld>
@@ -1329,7 +1329,7 @@
           <p:cNvPr id="2" name="タイトル 1">
             <a:extLst>
               <a:ext uri="{FF2B5EF4-FFF2-40B4-BE49-F238E27FC236}">
-                <a16:creationId xmlns:a16="http://schemas.microsoft.com/office/drawing/2014/main" id="{C7F493B3-8AA9-18B6-F58B-DF936D4F7B3D}"/>
+                <a16:creationId xmlns:a16="http://schemas.microsoft.com/office/drawing/2014/main" id="{4184F807-CC64-F0D1-3C49-5DCB1B356CBB}"/>
               </a:ext>
             </a:extLst>
           </p:cNvPr>
@@ -1357,7 +1357,7 @@
           <p:cNvPr id="3" name="コンテンツ プレースホルダー 2">
             <a:extLst>
               <a:ext uri="{FF2B5EF4-FFF2-40B4-BE49-F238E27FC236}">
-                <a16:creationId xmlns:a16="http://schemas.microsoft.com/office/drawing/2014/main" id="{31DD3ECB-4A63-69BB-DC79-EF6D22178B27}"/>
+                <a16:creationId xmlns:a16="http://schemas.microsoft.com/office/drawing/2014/main" id="{0B952ED9-8A46-3639-18DF-DC5FE9E0293C}"/>
               </a:ext>
             </a:extLst>
           </p:cNvPr>
@@ -1451,7 +1451,7 @@
           <p:cNvPr id="4" name="コンテンツ プレースホルダー 3">
             <a:extLst>
               <a:ext uri="{FF2B5EF4-FFF2-40B4-BE49-F238E27FC236}">
-                <a16:creationId xmlns:a16="http://schemas.microsoft.com/office/drawing/2014/main" id="{D7E18895-C3D7-4E5C-345E-CA231EF1BF83}"/>
+                <a16:creationId xmlns:a16="http://schemas.microsoft.com/office/drawing/2014/main" id="{6D4AA361-5589-19D4-AD47-7BE754755B8C}"/>
               </a:ext>
             </a:extLst>
           </p:cNvPr>
@@ -1545,7 +1545,7 @@
           <p:cNvPr id="5" name="日付プレースホルダー 4">
             <a:extLst>
               <a:ext uri="{FF2B5EF4-FFF2-40B4-BE49-F238E27FC236}">
-                <a16:creationId xmlns:a16="http://schemas.microsoft.com/office/drawing/2014/main" id="{03A6EA81-0B11-E155-C22A-5A9C7322DD72}"/>
+                <a16:creationId xmlns:a16="http://schemas.microsoft.com/office/drawing/2014/main" id="{9CF3C935-B26B-4A23-542A-549CF1093692}"/>
               </a:ext>
             </a:extLst>
           </p:cNvPr>
@@ -1561,7 +1561,7 @@
           <a:bodyPr/>
           <a:lstStyle/>
           <a:p>
-            <a:fld id="{8A6C07D3-D116-4840-9A4E-BC787B9BC9D4}" type="datetimeFigureOut">
+            <a:fld id="{E138AC11-6CA7-4E42-AF3F-4757D411B95C}" type="datetimeFigureOut">
               <a:rPr kumimoji="1" lang="ja-JP" altLang="en-US" smtClean="0"/>
               <a:t>2026/7/30</a:t>
             </a:fld>
@@ -1574,7 +1574,7 @@
           <p:cNvPr id="6" name="フッター プレースホルダー 5">
             <a:extLst>
               <a:ext uri="{FF2B5EF4-FFF2-40B4-BE49-F238E27FC236}">
-                <a16:creationId xmlns:a16="http://schemas.microsoft.com/office/drawing/2014/main" id="{2452DA9D-27A5-CD7C-8580-75AB023D2183}"/>
+                <a16:creationId xmlns:a16="http://schemas.microsoft.com/office/drawing/2014/main" id="{6CF81334-5723-06FD-E8A4-05098D12F3DE}"/>
               </a:ext>
             </a:extLst>
           </p:cNvPr>
@@ -1599,7 +1599,7 @@
           <p:cNvPr id="7" name="スライド番号プレースホルダー 6">
             <a:extLst>
               <a:ext uri="{FF2B5EF4-FFF2-40B4-BE49-F238E27FC236}">
-                <a16:creationId xmlns:a16="http://schemas.microsoft.com/office/drawing/2014/main" id="{AEA5E73A-744B-6000-43FD-825061CFAF5A}"/>
+                <a16:creationId xmlns:a16="http://schemas.microsoft.com/office/drawing/2014/main" id="{3C9288E9-4A50-4721-B984-E42DA6EAF3E1}"/>
               </a:ext>
             </a:extLst>
           </p:cNvPr>
@@ -1615,7 +1615,7 @@
           <a:bodyPr/>
           <a:lstStyle/>
           <a:p>
-            <a:fld id="{AF5F013A-3699-44BF-A632-E4794C1D1B6C}" type="slidenum">
+            <a:fld id="{6205F9B0-C1B4-44DD-92DB-84D5FAD413AE}" type="slidenum">
               <a:rPr kumimoji="1" lang="ja-JP" altLang="en-US" smtClean="0"/>
               <a:t>‹#›</a:t>
             </a:fld>
@@ -1626,7 +1626,7 @@
     </p:spTree>
     <p:extLst>
       <p:ext uri="{BB962C8B-B14F-4D97-AF65-F5344CB8AC3E}">
-        <p14:creationId xmlns:p14="http://schemas.microsoft.com/office/powerpoint/2010/main" val="2199576225"/>
+        <p14:creationId xmlns:p14="http://schemas.microsoft.com/office/powerpoint/2010/main" val="2546028167"/>
       </p:ext>
     </p:extLst>
   </p:cSld>
@@ -1658,7 +1658,7 @@
           <p:cNvPr id="2" name="タイトル 1">
             <a:extLst>
               <a:ext uri="{FF2B5EF4-FFF2-40B4-BE49-F238E27FC236}">
-                <a16:creationId xmlns:a16="http://schemas.microsoft.com/office/drawing/2014/main" id="{AE0BB618-176F-7F4F-F165-ECE0398D0EEB}"/>
+                <a16:creationId xmlns:a16="http://schemas.microsoft.com/office/drawing/2014/main" id="{6DF67E74-6839-6F1B-9E11-0879585A9F68}"/>
               </a:ext>
             </a:extLst>
           </p:cNvPr>
@@ -1691,7 +1691,7 @@
           <p:cNvPr id="3" name="テキスト プレースホルダー 2">
             <a:extLst>
               <a:ext uri="{FF2B5EF4-FFF2-40B4-BE49-F238E27FC236}">
-                <a16:creationId xmlns:a16="http://schemas.microsoft.com/office/drawing/2014/main" id="{3E5B5A86-EDC4-2CD6-4A47-EBE7B4CA43E0}"/>
+                <a16:creationId xmlns:a16="http://schemas.microsoft.com/office/drawing/2014/main" id="{A0E78AEC-40ED-BF9E-51E8-8301F971D626}"/>
               </a:ext>
             </a:extLst>
           </p:cNvPr>
@@ -1762,7 +1762,7 @@
           <p:cNvPr id="4" name="コンテンツ プレースホルダー 3">
             <a:extLst>
               <a:ext uri="{FF2B5EF4-FFF2-40B4-BE49-F238E27FC236}">
-                <a16:creationId xmlns:a16="http://schemas.microsoft.com/office/drawing/2014/main" id="{EFB81C67-A5D6-61FA-BDF6-E6C07DC4BA9D}"/>
+                <a16:creationId xmlns:a16="http://schemas.microsoft.com/office/drawing/2014/main" id="{58A6212F-3461-C892-0786-B04BC31C87F3}"/>
               </a:ext>
             </a:extLst>
           </p:cNvPr>
@@ -1856,7 +1856,7 @@
           <p:cNvPr id="5" name="テキスト プレースホルダー 4">
             <a:extLst>
               <a:ext uri="{FF2B5EF4-FFF2-40B4-BE49-F238E27FC236}">
-                <a16:creationId xmlns:a16="http://schemas.microsoft.com/office/drawing/2014/main" id="{9DBA40B3-5745-C651-23E0-C3C05804D957}"/>
+                <a16:creationId xmlns:a16="http://schemas.microsoft.com/office/drawing/2014/main" id="{DD228C49-47C9-B658-69D6-9CE0FD7F880A}"/>
               </a:ext>
             </a:extLst>
           </p:cNvPr>
@@ -1927,7 +1927,7 @@
           <p:cNvPr id="6" name="コンテンツ プレースホルダー 5">
             <a:extLst>
               <a:ext uri="{FF2B5EF4-FFF2-40B4-BE49-F238E27FC236}">
-                <a16:creationId xmlns:a16="http://schemas.microsoft.com/office/drawing/2014/main" id="{A65869BD-8C1F-45EC-5BFF-E49DC97231B2}"/>
+                <a16:creationId xmlns:a16="http://schemas.microsoft.com/office/drawing/2014/main" id="{F84C51FF-0EEF-429C-073C-C500ABD4D45F}"/>
               </a:ext>
             </a:extLst>
           </p:cNvPr>
@@ -2021,7 +2021,7 @@
           <p:cNvPr id="7" name="日付プレースホルダー 6">
             <a:extLst>
               <a:ext uri="{FF2B5EF4-FFF2-40B4-BE49-F238E27FC236}">
-                <a16:creationId xmlns:a16="http://schemas.microsoft.com/office/drawing/2014/main" id="{0A3722B0-9D41-B0F7-C1EB-506D67A634E5}"/>
+                <a16:creationId xmlns:a16="http://schemas.microsoft.com/office/drawing/2014/main" id="{84BF0B4B-416C-EDC1-1FCA-689EC5FAA53B}"/>
               </a:ext>
             </a:extLst>
           </p:cNvPr>
@@ -2037,7 +2037,7 @@
           <a:bodyPr/>
           <a:lstStyle/>
           <a:p>
-            <a:fld id="{8A6C07D3-D116-4840-9A4E-BC787B9BC9D4}" type="datetimeFigureOut">
+            <a:fld id="{E138AC11-6CA7-4E42-AF3F-4757D411B95C}" type="datetimeFigureOut">
               <a:rPr kumimoji="1" lang="ja-JP" altLang="en-US" smtClean="0"/>
               <a:t>2026/7/30</a:t>
             </a:fld>
@@ -2050,7 +2050,7 @@
           <p:cNvPr id="8" name="フッター プレースホルダー 7">
             <a:extLst>
               <a:ext uri="{FF2B5EF4-FFF2-40B4-BE49-F238E27FC236}">
-                <a16:creationId xmlns:a16="http://schemas.microsoft.com/office/drawing/2014/main" id="{42152288-07FD-34D7-9812-83B6671E55CD}"/>
+                <a16:creationId xmlns:a16="http://schemas.microsoft.com/office/drawing/2014/main" id="{0DC0E54C-840F-701E-0E33-330C5AA3D738}"/>
               </a:ext>
             </a:extLst>
           </p:cNvPr>
@@ -2075,7 +2075,7 @@
           <p:cNvPr id="9" name="スライド番号プレースホルダー 8">
             <a:extLst>
               <a:ext uri="{FF2B5EF4-FFF2-40B4-BE49-F238E27FC236}">
-                <a16:creationId xmlns:a16="http://schemas.microsoft.com/office/drawing/2014/main" id="{33F59D40-A4BD-C7B6-63A5-C2E1322D6D52}"/>
+                <a16:creationId xmlns:a16="http://schemas.microsoft.com/office/drawing/2014/main" id="{3939B29B-94CF-0382-DCA7-BE7ABB562252}"/>
               </a:ext>
             </a:extLst>
           </p:cNvPr>
@@ -2091,7 +2091,7 @@
           <a:bodyPr/>
           <a:lstStyle/>
           <a:p>
-            <a:fld id="{AF5F013A-3699-44BF-A632-E4794C1D1B6C}" type="slidenum">
+            <a:fld id="{6205F9B0-C1B4-44DD-92DB-84D5FAD413AE}" type="slidenum">
               <a:rPr kumimoji="1" lang="ja-JP" altLang="en-US" smtClean="0"/>
               <a:t>‹#›</a:t>
             </a:fld>
@@ -2102,7 +2102,7 @@
     </p:spTree>
     <p:extLst>
       <p:ext uri="{BB962C8B-B14F-4D97-AF65-F5344CB8AC3E}">
-        <p14:creationId xmlns:p14="http://schemas.microsoft.com/office/powerpoint/2010/main" val="2038099295"/>
+        <p14:creationId xmlns:p14="http://schemas.microsoft.com/office/powerpoint/2010/main" val="1932702005"/>
       </p:ext>
     </p:extLst>
   </p:cSld>
@@ -2134,7 +2134,7 @@
           <p:cNvPr id="2" name="タイトル 1">
             <a:extLst>
               <a:ext uri="{FF2B5EF4-FFF2-40B4-BE49-F238E27FC236}">
-                <a16:creationId xmlns:a16="http://schemas.microsoft.com/office/drawing/2014/main" id="{E60BCD53-F381-B744-7231-A31D402DF858}"/>
+                <a16:creationId xmlns:a16="http://schemas.microsoft.com/office/drawing/2014/main" id="{964B2D23-194A-39A6-07ED-C75F41CC13C7}"/>
               </a:ext>
             </a:extLst>
           </p:cNvPr>
@@ -2162,7 +2162,7 @@
           <p:cNvPr id="3" name="日付プレースホルダー 2">
             <a:extLst>
               <a:ext uri="{FF2B5EF4-FFF2-40B4-BE49-F238E27FC236}">
-                <a16:creationId xmlns:a16="http://schemas.microsoft.com/office/drawing/2014/main" id="{584CF6B5-76AF-0D64-BCEF-9EF3AB9BFF28}"/>
+                <a16:creationId xmlns:a16="http://schemas.microsoft.com/office/drawing/2014/main" id="{735305F9-5A8D-A4F1-7E47-23790E682D7C}"/>
               </a:ext>
             </a:extLst>
           </p:cNvPr>
@@ -2178,7 +2178,7 @@
           <a:bodyPr/>
           <a:lstStyle/>
           <a:p>
-            <a:fld id="{8A6C07D3-D116-4840-9A4E-BC787B9BC9D4}" type="datetimeFigureOut">
+            <a:fld id="{E138AC11-6CA7-4E42-AF3F-4757D411B95C}" type="datetimeFigureOut">
               <a:rPr kumimoji="1" lang="ja-JP" altLang="en-US" smtClean="0"/>
               <a:t>2026/7/30</a:t>
             </a:fld>
@@ -2191,7 +2191,7 @@
           <p:cNvPr id="4" name="フッター プレースホルダー 3">
             <a:extLst>
               <a:ext uri="{FF2B5EF4-FFF2-40B4-BE49-F238E27FC236}">
-                <a16:creationId xmlns:a16="http://schemas.microsoft.com/office/drawing/2014/main" id="{BDCF2EF4-90CD-4189-11BF-B58C1EF9CDC7}"/>
+                <a16:creationId xmlns:a16="http://schemas.microsoft.com/office/drawing/2014/main" id="{A05E05BB-BF24-6025-24DD-DA80DB983F61}"/>
               </a:ext>
             </a:extLst>
           </p:cNvPr>
@@ -2216,7 +2216,7 @@
           <p:cNvPr id="5" name="スライド番号プレースホルダー 4">
             <a:extLst>
               <a:ext uri="{FF2B5EF4-FFF2-40B4-BE49-F238E27FC236}">
-                <a16:creationId xmlns:a16="http://schemas.microsoft.com/office/drawing/2014/main" id="{2789045B-A8E3-B930-4E12-1D7DFC794E65}"/>
+                <a16:creationId xmlns:a16="http://schemas.microsoft.com/office/drawing/2014/main" id="{5FFA5421-DB71-DE64-9448-4E6613BCDE63}"/>
               </a:ext>
             </a:extLst>
           </p:cNvPr>
@@ -2232,7 +2232,7 @@
           <a:bodyPr/>
           <a:lstStyle/>
           <a:p>
-            <a:fld id="{AF5F013A-3699-44BF-A632-E4794C1D1B6C}" type="slidenum">
+            <a:fld id="{6205F9B0-C1B4-44DD-92DB-84D5FAD413AE}" type="slidenum">
               <a:rPr kumimoji="1" lang="ja-JP" altLang="en-US" smtClean="0"/>
               <a:t>‹#›</a:t>
             </a:fld>
@@ -2243,7 +2243,7 @@
     </p:spTree>
     <p:extLst>
       <p:ext uri="{BB962C8B-B14F-4D97-AF65-F5344CB8AC3E}">
-        <p14:creationId xmlns:p14="http://schemas.microsoft.com/office/powerpoint/2010/main" val="3726881875"/>
+        <p14:creationId xmlns:p14="http://schemas.microsoft.com/office/powerpoint/2010/main" val="1857176003"/>
       </p:ext>
     </p:extLst>
   </p:cSld>
@@ -2275,7 +2275,7 @@
           <p:cNvPr id="2" name="日付プレースホルダー 1">
             <a:extLst>
               <a:ext uri="{FF2B5EF4-FFF2-40B4-BE49-F238E27FC236}">
-                <a16:creationId xmlns:a16="http://schemas.microsoft.com/office/drawing/2014/main" id="{37FC60BB-862F-6BB0-25A4-8FD7D948ED21}"/>
+                <a16:creationId xmlns:a16="http://schemas.microsoft.com/office/drawing/2014/main" id="{16DF4F4A-AA48-877A-755E-E1957A86EDE7}"/>
               </a:ext>
             </a:extLst>
           </p:cNvPr>
@@ -2291,7 +2291,7 @@
           <a:bodyPr/>
           <a:lstStyle/>
           <a:p>
-            <a:fld id="{8A6C07D3-D116-4840-9A4E-BC787B9BC9D4}" type="datetimeFigureOut">
+            <a:fld id="{E138AC11-6CA7-4E42-AF3F-4757D411B95C}" type="datetimeFigureOut">
               <a:rPr kumimoji="1" lang="ja-JP" altLang="en-US" smtClean="0"/>
               <a:t>2026/7/30</a:t>
             </a:fld>
@@ -2304,7 +2304,7 @@
           <p:cNvPr id="3" name="フッター プレースホルダー 2">
             <a:extLst>
               <a:ext uri="{FF2B5EF4-FFF2-40B4-BE49-F238E27FC236}">
-                <a16:creationId xmlns:a16="http://schemas.microsoft.com/office/drawing/2014/main" id="{57714354-12BB-A3EC-E9FE-8D9F77DAFC4F}"/>
+                <a16:creationId xmlns:a16="http://schemas.microsoft.com/office/drawing/2014/main" id="{E0621C8A-F3BA-A311-D6FB-9C63E32B9F81}"/>
               </a:ext>
             </a:extLst>
           </p:cNvPr>
@@ -2329,7 +2329,7 @@
           <p:cNvPr id="4" name="スライド番号プレースホルダー 3">
             <a:extLst>
               <a:ext uri="{FF2B5EF4-FFF2-40B4-BE49-F238E27FC236}">
-                <a16:creationId xmlns:a16="http://schemas.microsoft.com/office/drawing/2014/main" id="{3B3AA73C-10FB-B1E0-8162-1B740085A5D7}"/>
+                <a16:creationId xmlns:a16="http://schemas.microsoft.com/office/drawing/2014/main" id="{20919F4F-B735-0103-9322-B9708DF118C5}"/>
               </a:ext>
             </a:extLst>
           </p:cNvPr>
@@ -2345,7 +2345,7 @@
           <a:bodyPr/>
           <a:lstStyle/>
           <a:p>
-            <a:fld id="{AF5F013A-3699-44BF-A632-E4794C1D1B6C}" type="slidenum">
+            <a:fld id="{6205F9B0-C1B4-44DD-92DB-84D5FAD413AE}" type="slidenum">
               <a:rPr kumimoji="1" lang="ja-JP" altLang="en-US" smtClean="0"/>
               <a:t>‹#›</a:t>
             </a:fld>
@@ -2356,7 +2356,7 @@
     </p:spTree>
     <p:extLst>
       <p:ext uri="{BB962C8B-B14F-4D97-AF65-F5344CB8AC3E}">
-        <p14:creationId xmlns:p14="http://schemas.microsoft.com/office/powerpoint/2010/main" val="3562425315"/>
+        <p14:creationId xmlns:p14="http://schemas.microsoft.com/office/powerpoint/2010/main" val="2130003779"/>
       </p:ext>
     </p:extLst>
   </p:cSld>
@@ -2388,7 +2388,7 @@
           <p:cNvPr id="2" name="タイトル 1">
             <a:extLst>
               <a:ext uri="{FF2B5EF4-FFF2-40B4-BE49-F238E27FC236}">
-                <a16:creationId xmlns:a16="http://schemas.microsoft.com/office/drawing/2014/main" id="{64A2868E-13C6-C47D-B3FE-5651C7CC9398}"/>
+                <a16:creationId xmlns:a16="http://schemas.microsoft.com/office/drawing/2014/main" id="{07AE5579-B853-7D92-FD65-F5EB5F47C2A5}"/>
               </a:ext>
             </a:extLst>
           </p:cNvPr>
@@ -2425,7 +2425,7 @@
           <p:cNvPr id="3" name="コンテンツ プレースホルダー 2">
             <a:extLst>
               <a:ext uri="{FF2B5EF4-FFF2-40B4-BE49-F238E27FC236}">
-                <a16:creationId xmlns:a16="http://schemas.microsoft.com/office/drawing/2014/main" id="{4AE57E60-8A06-57DB-4070-A1090429245F}"/>
+                <a16:creationId xmlns:a16="http://schemas.microsoft.com/office/drawing/2014/main" id="{EC66111A-06E7-0B5F-100B-29860432BB3F}"/>
               </a:ext>
             </a:extLst>
           </p:cNvPr>
@@ -2547,7 +2547,7 @@
           <p:cNvPr id="4" name="テキスト プレースホルダー 3">
             <a:extLst>
               <a:ext uri="{FF2B5EF4-FFF2-40B4-BE49-F238E27FC236}">
-                <a16:creationId xmlns:a16="http://schemas.microsoft.com/office/drawing/2014/main" id="{FEB15CCB-9D52-7CCC-9096-5CFDBF9C5897}"/>
+                <a16:creationId xmlns:a16="http://schemas.microsoft.com/office/drawing/2014/main" id="{AADD940A-8EF4-77F8-3386-958372710421}"/>
               </a:ext>
             </a:extLst>
           </p:cNvPr>
@@ -2618,7 +2618,7 @@
           <p:cNvPr id="5" name="日付プレースホルダー 4">
             <a:extLst>
               <a:ext uri="{FF2B5EF4-FFF2-40B4-BE49-F238E27FC236}">
-                <a16:creationId xmlns:a16="http://schemas.microsoft.com/office/drawing/2014/main" id="{0851E0DE-97AF-AA22-D1E8-F2DF61E8D0EB}"/>
+                <a16:creationId xmlns:a16="http://schemas.microsoft.com/office/drawing/2014/main" id="{4E958B4D-8246-2403-7E02-6E0316D5358F}"/>
               </a:ext>
             </a:extLst>
           </p:cNvPr>
@@ -2634,7 +2634,7 @@
           <a:bodyPr/>
           <a:lstStyle/>
           <a:p>
-            <a:fld id="{8A6C07D3-D116-4840-9A4E-BC787B9BC9D4}" type="datetimeFigureOut">
+            <a:fld id="{E138AC11-6CA7-4E42-AF3F-4757D411B95C}" type="datetimeFigureOut">
               <a:rPr kumimoji="1" lang="ja-JP" altLang="en-US" smtClean="0"/>
               <a:t>2026/7/30</a:t>
             </a:fld>
@@ -2647,7 +2647,7 @@
           <p:cNvPr id="6" name="フッター プレースホルダー 5">
             <a:extLst>
               <a:ext uri="{FF2B5EF4-FFF2-40B4-BE49-F238E27FC236}">
-                <a16:creationId xmlns:a16="http://schemas.microsoft.com/office/drawing/2014/main" id="{8C2E89B7-F5A4-DEA4-E0C0-3C7F3BD4455E}"/>
+                <a16:creationId xmlns:a16="http://schemas.microsoft.com/office/drawing/2014/main" id="{9656E14B-E910-6EA9-B457-42A7B79581BC}"/>
               </a:ext>
             </a:extLst>
           </p:cNvPr>
@@ -2672,7 +2672,7 @@
           <p:cNvPr id="7" name="スライド番号プレースホルダー 6">
             <a:extLst>
               <a:ext uri="{FF2B5EF4-FFF2-40B4-BE49-F238E27FC236}">
-                <a16:creationId xmlns:a16="http://schemas.microsoft.com/office/drawing/2014/main" id="{714011F9-7516-C4A4-F9D1-DC81DB9F8FAC}"/>
+                <a16:creationId xmlns:a16="http://schemas.microsoft.com/office/drawing/2014/main" id="{28BC5AAA-156D-1D01-0EFF-54553FFF9C08}"/>
               </a:ext>
             </a:extLst>
           </p:cNvPr>
@@ -2688,7 +2688,7 @@
           <a:bodyPr/>
           <a:lstStyle/>
           <a:p>
-            <a:fld id="{AF5F013A-3699-44BF-A632-E4794C1D1B6C}" type="slidenum">
+            <a:fld id="{6205F9B0-C1B4-44DD-92DB-84D5FAD413AE}" type="slidenum">
               <a:rPr kumimoji="1" lang="ja-JP" altLang="en-US" smtClean="0"/>
               <a:t>‹#›</a:t>
             </a:fld>
@@ -2699,7 +2699,7 @@
     </p:spTree>
     <p:extLst>
       <p:ext uri="{BB962C8B-B14F-4D97-AF65-F5344CB8AC3E}">
-        <p14:creationId xmlns:p14="http://schemas.microsoft.com/office/powerpoint/2010/main" val="1728112696"/>
+        <p14:creationId xmlns:p14="http://schemas.microsoft.com/office/powerpoint/2010/main" val="1048879293"/>
       </p:ext>
     </p:extLst>
   </p:cSld>
@@ -2731,7 +2731,7 @@
           <p:cNvPr id="2" name="タイトル 1">
             <a:extLst>
               <a:ext uri="{FF2B5EF4-FFF2-40B4-BE49-F238E27FC236}">
-                <a16:creationId xmlns:a16="http://schemas.microsoft.com/office/drawing/2014/main" id="{6D0A4448-BB9E-A564-1682-52CB747DBF3E}"/>
+                <a16:creationId xmlns:a16="http://schemas.microsoft.com/office/drawing/2014/main" id="{366AC85D-E753-6E33-E8BE-DE71F97DAEF1}"/>
               </a:ext>
             </a:extLst>
           </p:cNvPr>
@@ -2768,7 +2768,7 @@
           <p:cNvPr id="3" name="図プレースホルダー 2">
             <a:extLst>
               <a:ext uri="{FF2B5EF4-FFF2-40B4-BE49-F238E27FC236}">
-                <a16:creationId xmlns:a16="http://schemas.microsoft.com/office/drawing/2014/main" id="{8DA8E0E7-78F8-C155-F92D-52EC42D88720}"/>
+                <a16:creationId xmlns:a16="http://schemas.microsoft.com/office/drawing/2014/main" id="{AB14719E-7F57-B51F-0755-A0AE48C77CEC}"/>
               </a:ext>
             </a:extLst>
           </p:cNvPr>
@@ -2835,7 +2835,7 @@
           <p:cNvPr id="4" name="テキスト プレースホルダー 3">
             <a:extLst>
               <a:ext uri="{FF2B5EF4-FFF2-40B4-BE49-F238E27FC236}">
-                <a16:creationId xmlns:a16="http://schemas.microsoft.com/office/drawing/2014/main" id="{2C5FC0FF-6030-7F92-0046-677B1F6564A6}"/>
+                <a16:creationId xmlns:a16="http://schemas.microsoft.com/office/drawing/2014/main" id="{394F7703-A784-0981-B803-9B034EC61AF9}"/>
               </a:ext>
             </a:extLst>
           </p:cNvPr>
@@ -2906,7 +2906,7 @@
           <p:cNvPr id="5" name="日付プレースホルダー 4">
             <a:extLst>
               <a:ext uri="{FF2B5EF4-FFF2-40B4-BE49-F238E27FC236}">
-                <a16:creationId xmlns:a16="http://schemas.microsoft.com/office/drawing/2014/main" id="{416E7F0B-B358-E0A1-D5FD-6B9DB80FC243}"/>
+                <a16:creationId xmlns:a16="http://schemas.microsoft.com/office/drawing/2014/main" id="{79E3910C-7995-12FE-56BA-97136D4BA85D}"/>
               </a:ext>
             </a:extLst>
           </p:cNvPr>
@@ -2922,7 +2922,7 @@
           <a:bodyPr/>
           <a:lstStyle/>
           <a:p>
-            <a:fld id="{8A6C07D3-D116-4840-9A4E-BC787B9BC9D4}" type="datetimeFigureOut">
+            <a:fld id="{E138AC11-6CA7-4E42-AF3F-4757D411B95C}" type="datetimeFigureOut">
               <a:rPr kumimoji="1" lang="ja-JP" altLang="en-US" smtClean="0"/>
               <a:t>2026/7/30</a:t>
             </a:fld>
@@ -2935,7 +2935,7 @@
           <p:cNvPr id="6" name="フッター プレースホルダー 5">
             <a:extLst>
               <a:ext uri="{FF2B5EF4-FFF2-40B4-BE49-F238E27FC236}">
-                <a16:creationId xmlns:a16="http://schemas.microsoft.com/office/drawing/2014/main" id="{C7843AC0-1FBA-628D-CFC8-9908E9071F9D}"/>
+                <a16:creationId xmlns:a16="http://schemas.microsoft.com/office/drawing/2014/main" id="{08A9B30C-EDD1-BC41-06BF-9171F61DB527}"/>
               </a:ext>
             </a:extLst>
           </p:cNvPr>
@@ -2960,7 +2960,7 @@
           <p:cNvPr id="7" name="スライド番号プレースホルダー 6">
             <a:extLst>
               <a:ext uri="{FF2B5EF4-FFF2-40B4-BE49-F238E27FC236}">
-                <a16:creationId xmlns:a16="http://schemas.microsoft.com/office/drawing/2014/main" id="{D104D0D9-D27B-4E41-CC69-0643E388022D}"/>
+                <a16:creationId xmlns:a16="http://schemas.microsoft.com/office/drawing/2014/main" id="{418885FD-FF98-D9BB-6828-CC732B654008}"/>
               </a:ext>
             </a:extLst>
           </p:cNvPr>
@@ -2976,7 +2976,7 @@
           <a:bodyPr/>
           <a:lstStyle/>
           <a:p>
-            <a:fld id="{AF5F013A-3699-44BF-A632-E4794C1D1B6C}" type="slidenum">
+            <a:fld id="{6205F9B0-C1B4-44DD-92DB-84D5FAD413AE}" type="slidenum">
               <a:rPr kumimoji="1" lang="ja-JP" altLang="en-US" smtClean="0"/>
               <a:t>‹#›</a:t>
             </a:fld>
@@ -2987,7 +2987,7 @@
     </p:spTree>
     <p:extLst>
       <p:ext uri="{BB962C8B-B14F-4D97-AF65-F5344CB8AC3E}">
-        <p14:creationId xmlns:p14="http://schemas.microsoft.com/office/powerpoint/2010/main" val="2321775836"/>
+        <p14:creationId xmlns:p14="http://schemas.microsoft.com/office/powerpoint/2010/main" val="1083303866"/>
       </p:ext>
     </p:extLst>
   </p:cSld>
@@ -3024,7 +3024,7 @@
           <p:cNvPr id="2" name="タイトル プレースホルダー 1">
             <a:extLst>
               <a:ext uri="{FF2B5EF4-FFF2-40B4-BE49-F238E27FC236}">
-                <a16:creationId xmlns:a16="http://schemas.microsoft.com/office/drawing/2014/main" id="{E36F4087-8923-9E27-3D57-B3F9040434DF}"/>
+                <a16:creationId xmlns:a16="http://schemas.microsoft.com/office/drawing/2014/main" id="{A525AE78-2E44-4600-7207-EA22DA7B262E}"/>
               </a:ext>
             </a:extLst>
           </p:cNvPr>
@@ -3062,7 +3062,7 @@
           <p:cNvPr id="3" name="テキスト プレースホルダー 2">
             <a:extLst>
               <a:ext uri="{FF2B5EF4-FFF2-40B4-BE49-F238E27FC236}">
-                <a16:creationId xmlns:a16="http://schemas.microsoft.com/office/drawing/2014/main" id="{A7DE9373-4754-C5FD-5C1B-96A7CCEE4541}"/>
+                <a16:creationId xmlns:a16="http://schemas.microsoft.com/office/drawing/2014/main" id="{04FF6004-D1A7-21CA-9E3F-ADFB98CFDB07}"/>
               </a:ext>
             </a:extLst>
           </p:cNvPr>
@@ -3161,7 +3161,7 @@
           <p:cNvPr id="4" name="日付プレースホルダー 3">
             <a:extLst>
               <a:ext uri="{FF2B5EF4-FFF2-40B4-BE49-F238E27FC236}">
-                <a16:creationId xmlns:a16="http://schemas.microsoft.com/office/drawing/2014/main" id="{DBFF85A4-ACCB-12D4-16FA-5BA7308EEFF2}"/>
+                <a16:creationId xmlns:a16="http://schemas.microsoft.com/office/drawing/2014/main" id="{F0C443A7-E8CF-8313-614B-A0B59D0CC0D1}"/>
               </a:ext>
             </a:extLst>
           </p:cNvPr>
@@ -3195,7 +3195,7 @@
             </a:lvl1pPr>
           </a:lstStyle>
           <a:p>
-            <a:fld id="{8A6C07D3-D116-4840-9A4E-BC787B9BC9D4}" type="datetimeFigureOut">
+            <a:fld id="{E138AC11-6CA7-4E42-AF3F-4757D411B95C}" type="datetimeFigureOut">
               <a:rPr kumimoji="1" lang="ja-JP" altLang="en-US" smtClean="0"/>
               <a:t>2026/7/30</a:t>
             </a:fld>
@@ -3208,7 +3208,7 @@
           <p:cNvPr id="5" name="フッター プレースホルダー 4">
             <a:extLst>
               <a:ext uri="{FF2B5EF4-FFF2-40B4-BE49-F238E27FC236}">
-                <a16:creationId xmlns:a16="http://schemas.microsoft.com/office/drawing/2014/main" id="{FCC9A0E6-7FE2-F5C3-1907-F808F5EEC638}"/>
+                <a16:creationId xmlns:a16="http://schemas.microsoft.com/office/drawing/2014/main" id="{065E345B-7F10-574B-45B4-476ED2323F2F}"/>
               </a:ext>
             </a:extLst>
           </p:cNvPr>
@@ -3251,7 +3251,7 @@
           <p:cNvPr id="6" name="スライド番号プレースホルダー 5">
             <a:extLst>
               <a:ext uri="{FF2B5EF4-FFF2-40B4-BE49-F238E27FC236}">
-                <a16:creationId xmlns:a16="http://schemas.microsoft.com/office/drawing/2014/main" id="{8715D8EE-C19D-A1A9-D397-02ACA4A3CB4F}"/>
+                <a16:creationId xmlns:a16="http://schemas.microsoft.com/office/drawing/2014/main" id="{A349B080-4674-A4E7-5DE3-50E4E9FCC13F}"/>
               </a:ext>
             </a:extLst>
           </p:cNvPr>
@@ -3285,7 +3285,7 @@
             </a:lvl1pPr>
           </a:lstStyle>
           <a:p>
-            <a:fld id="{AF5F013A-3699-44BF-A632-E4794C1D1B6C}" type="slidenum">
+            <a:fld id="{6205F9B0-C1B4-44DD-92DB-84D5FAD413AE}" type="slidenum">
               <a:rPr kumimoji="1" lang="ja-JP" altLang="en-US" smtClean="0"/>
               <a:t>‹#›</a:t>
             </a:fld>
@@ -3296,7 +3296,7 @@
     </p:spTree>
     <p:extLst>
       <p:ext uri="{BB962C8B-B14F-4D97-AF65-F5344CB8AC3E}">
-        <p14:creationId xmlns:p14="http://schemas.microsoft.com/office/powerpoint/2010/main" val="1838511745"/>
+        <p14:creationId xmlns:p14="http://schemas.microsoft.com/office/powerpoint/2010/main" val="329554035"/>
       </p:ext>
     </p:extLst>
   </p:cSld>
@@ -3619,7 +3619,7 @@
           <p:cNvPr id="2" name="テキスト ボックス 1">
             <a:extLst>
               <a:ext uri="{FF2B5EF4-FFF2-40B4-BE49-F238E27FC236}">
-                <a16:creationId xmlns:a16="http://schemas.microsoft.com/office/drawing/2014/main" id="{504ADA4E-9AD6-CFC0-95F4-B475189B029D}"/>
+                <a16:creationId xmlns:a16="http://schemas.microsoft.com/office/drawing/2014/main" id="{6AAE3FF9-27DF-9874-9E79-16B04A4C4C90}"/>
               </a:ext>
             </a:extLst>
           </p:cNvPr>
@@ -3665,7 +3665,7 @@
           <p:cNvPr id="3" name="テキスト ボックス 2">
             <a:extLst>
               <a:ext uri="{FF2B5EF4-FFF2-40B4-BE49-F238E27FC236}">
-                <a16:creationId xmlns:a16="http://schemas.microsoft.com/office/drawing/2014/main" id="{475CC518-2B6F-2B10-8899-701965A1679E}"/>
+                <a16:creationId xmlns:a16="http://schemas.microsoft.com/office/drawing/2014/main" id="{612E6AB2-FED1-950D-0BD6-AF5A61FE8D7A}"/>
               </a:ext>
             </a:extLst>
           </p:cNvPr>
@@ -3714,7 +3714,7 @@
           <p:cNvPr id="4" name="テキスト ボックス 3">
             <a:extLst>
               <a:ext uri="{FF2B5EF4-FFF2-40B4-BE49-F238E27FC236}">
-                <a16:creationId xmlns:a16="http://schemas.microsoft.com/office/drawing/2014/main" id="{AF7020F8-A3FC-4A05-CC0B-410D524A65F9}"/>
+                <a16:creationId xmlns:a16="http://schemas.microsoft.com/office/drawing/2014/main" id="{D99DFCC4-DAEB-1237-3D70-2910D9563A55}"/>
               </a:ext>
             </a:extLst>
           </p:cNvPr>
@@ -3754,7 +3754,7 @@
           <p:cNvPr id="5" name="テキスト ボックス 4">
             <a:extLst>
               <a:ext uri="{FF2B5EF4-FFF2-40B4-BE49-F238E27FC236}">
-                <a16:creationId xmlns:a16="http://schemas.microsoft.com/office/drawing/2014/main" id="{C90C9CEC-22FA-F7DC-5410-3C65DE147535}"/>
+                <a16:creationId xmlns:a16="http://schemas.microsoft.com/office/drawing/2014/main" id="{5331DE88-F5BD-FF5F-BC79-E402F83FF8A5}"/>
               </a:ext>
             </a:extLst>
           </p:cNvPr>
@@ -3801,7 +3801,7 @@
             <a:hlinkClick r:id="" action="ppaction://media"/>
             <a:extLst>
               <a:ext uri="{FF2B5EF4-FFF2-40B4-BE49-F238E27FC236}">
-                <a16:creationId xmlns:a16="http://schemas.microsoft.com/office/drawing/2014/main" id="{132748FD-6A0A-D7BF-1C3F-1CC6FD27A23B}"/>
+                <a16:creationId xmlns:a16="http://schemas.microsoft.com/office/drawing/2014/main" id="{9B2E4BE7-03CE-4C8C-DBB7-9C05A32F43CE}"/>
               </a:ext>
             </a:extLst>
           </p:cNvPr>
@@ -3836,7 +3836,7 @@
     </p:spTree>
     <p:extLst>
       <p:ext uri="{BB962C8B-B14F-4D97-AF65-F5344CB8AC3E}">
-        <p14:creationId xmlns:p14="http://schemas.microsoft.com/office/powerpoint/2010/main" val="95003512"/>
+        <p14:creationId xmlns:p14="http://schemas.microsoft.com/office/powerpoint/2010/main" val="2155919945"/>
       </p:ext>
     </p:extLst>
   </p:cSld>
@@ -3960,7 +3960,7 @@
           <p:cNvPr id="2" name="テキスト ボックス 1">
             <a:extLst>
               <a:ext uri="{FF2B5EF4-FFF2-40B4-BE49-F238E27FC236}">
-                <a16:creationId xmlns:a16="http://schemas.microsoft.com/office/drawing/2014/main" id="{7173027A-84A5-787E-B207-AE738A65D5AA}"/>
+                <a16:creationId xmlns:a16="http://schemas.microsoft.com/office/drawing/2014/main" id="{69C64E18-5E7D-7E6A-0224-BA1EF3408350}"/>
               </a:ext>
             </a:extLst>
           </p:cNvPr>
@@ -4006,7 +4006,7 @@
           <p:cNvPr id="3" name="テキスト ボックス 2">
             <a:extLst>
               <a:ext uri="{FF2B5EF4-FFF2-40B4-BE49-F238E27FC236}">
-                <a16:creationId xmlns:a16="http://schemas.microsoft.com/office/drawing/2014/main" id="{27EEF0CF-FD0F-DE8D-4BAD-B9AEF72EE551}"/>
+                <a16:creationId xmlns:a16="http://schemas.microsoft.com/office/drawing/2014/main" id="{F6433209-37ED-3E80-DED0-55F50A2544E3}"/>
               </a:ext>
             </a:extLst>
           </p:cNvPr>
@@ -4046,7 +4046,7 @@
           <p:cNvPr id="4" name="テキスト ボックス 3">
             <a:extLst>
               <a:ext uri="{FF2B5EF4-FFF2-40B4-BE49-F238E27FC236}">
-                <a16:creationId xmlns:a16="http://schemas.microsoft.com/office/drawing/2014/main" id="{FE8FF81F-50F5-7125-EE2B-19019C75343D}"/>
+                <a16:creationId xmlns:a16="http://schemas.microsoft.com/office/drawing/2014/main" id="{8D5179A2-2224-453C-0A35-5031370D6BF1}"/>
               </a:ext>
             </a:extLst>
           </p:cNvPr>
@@ -4076,14 +4076,17 @@
                 </a:solidFill>
                 <a:latin typeface="Arial" panose="020B0604020202020204" pitchFamily="34" charset="0"/>
               </a:rPr>
-              <a:t>About Laravel Laravel is a web application framework with expressive, elegant syntax</a:t>
-            </a:r>
-            <a:endParaRPr kumimoji="1" lang="ja-JP" altLang="en-US" sz="2000">
-              <a:solidFill>
-                <a:srgbClr val="333333"/>
-              </a:solidFill>
-              <a:latin typeface="Arial" panose="020B0604020202020204" pitchFamily="34" charset="0"/>
-            </a:endParaRPr>
+              <a:t>Hikkoshi Hikaku</a:t>
+            </a:r>
+            <a:r>
+              <a:rPr kumimoji="1" lang="ja-JP" altLang="en-US" sz="2000">
+                <a:solidFill>
+                  <a:srgbClr val="333333"/>
+                </a:solidFill>
+                <a:latin typeface="Arial" panose="020B0604020202020204" pitchFamily="34" charset="0"/>
+              </a:rPr>
+              <a:t>の目的、構成、実装を公開コードから確認できるプロジェクトです。</a:t>
+            </a:r>
           </a:p>
         </p:txBody>
       </p:sp>
@@ -4092,7 +4095,7 @@
           <p:cNvPr id="5" name="テキスト ボックス 4">
             <a:extLst>
               <a:ext uri="{FF2B5EF4-FFF2-40B4-BE49-F238E27FC236}">
-                <a16:creationId xmlns:a16="http://schemas.microsoft.com/office/drawing/2014/main" id="{2321E6C1-CA1D-E8D4-050C-E82A82173710}"/>
+                <a16:creationId xmlns:a16="http://schemas.microsoft.com/office/drawing/2014/main" id="{7AD97905-83D6-1507-634A-2B1AD7C70A64}"/>
               </a:ext>
             </a:extLst>
           </p:cNvPr>
@@ -4139,7 +4142,7 @@
             <a:hlinkClick r:id="" action="ppaction://media"/>
             <a:extLst>
               <a:ext uri="{FF2B5EF4-FFF2-40B4-BE49-F238E27FC236}">
-                <a16:creationId xmlns:a16="http://schemas.microsoft.com/office/drawing/2014/main" id="{574600A1-9DD2-48CA-441F-B89B75E81449}"/>
+                <a16:creationId xmlns:a16="http://schemas.microsoft.com/office/drawing/2014/main" id="{32C925D9-C472-48CB-FAA0-88F4E63D6D90}"/>
               </a:ext>
             </a:extLst>
           </p:cNvPr>
@@ -4174,7 +4177,7 @@
     </p:spTree>
     <p:extLst>
       <p:ext uri="{BB962C8B-B14F-4D97-AF65-F5344CB8AC3E}">
-        <p14:creationId xmlns:p14="http://schemas.microsoft.com/office/powerpoint/2010/main" val="1326193718"/>
+        <p14:creationId xmlns:p14="http://schemas.microsoft.com/office/powerpoint/2010/main" val="3550552212"/>
       </p:ext>
     </p:extLst>
   </p:cSld>
@@ -4217,7 +4220,7 @@
                                   <p:childTnLst>
                                     <p:cmd type="call" cmd="playFrom(0.0)">
                                       <p:cBhvr>
-                                        <p:cTn id="6" dur="7780" fill="hold"/>
+                                        <p:cTn id="6" dur="7221" fill="hold"/>
                                         <p:tgtEl>
                                           <p:spTgt spid="6"/>
                                         </p:tgtEl>
@@ -4298,7 +4301,7 @@
           <p:cNvPr id="2" name="テキスト ボックス 1">
             <a:extLst>
               <a:ext uri="{FF2B5EF4-FFF2-40B4-BE49-F238E27FC236}">
-                <a16:creationId xmlns:a16="http://schemas.microsoft.com/office/drawing/2014/main" id="{465EE937-EBE6-1DBF-9233-B1FF885E18EC}"/>
+                <a16:creationId xmlns:a16="http://schemas.microsoft.com/office/drawing/2014/main" id="{E09EA6AC-6445-3139-B075-6BFEAB163903}"/>
               </a:ext>
             </a:extLst>
           </p:cNvPr>
@@ -4344,7 +4347,7 @@
           <p:cNvPr id="3" name="テキスト ボックス 2">
             <a:extLst>
               <a:ext uri="{FF2B5EF4-FFF2-40B4-BE49-F238E27FC236}">
-                <a16:creationId xmlns:a16="http://schemas.microsoft.com/office/drawing/2014/main" id="{BD919B9E-8D0C-503F-B111-DC2983EB7208}"/>
+                <a16:creationId xmlns:a16="http://schemas.microsoft.com/office/drawing/2014/main" id="{985C5BA9-639D-9C3B-D2BA-19C6D22CCBE5}"/>
               </a:ext>
             </a:extLst>
           </p:cNvPr>
@@ -4384,7 +4387,7 @@
           <p:cNvPr id="4" name="テキスト ボックス 3">
             <a:extLst>
               <a:ext uri="{FF2B5EF4-FFF2-40B4-BE49-F238E27FC236}">
-                <a16:creationId xmlns:a16="http://schemas.microsoft.com/office/drawing/2014/main" id="{D0BF5588-D274-30BC-E246-3CE0D7F064F3}"/>
+                <a16:creationId xmlns:a16="http://schemas.microsoft.com/office/drawing/2014/main" id="{1AD30BA3-33DC-6060-AB20-FBAD9AF99583}"/>
               </a:ext>
             </a:extLst>
           </p:cNvPr>
@@ -4497,7 +4500,7 @@
           <p:cNvPr id="5" name="テキスト ボックス 4">
             <a:extLst>
               <a:ext uri="{FF2B5EF4-FFF2-40B4-BE49-F238E27FC236}">
-                <a16:creationId xmlns:a16="http://schemas.microsoft.com/office/drawing/2014/main" id="{2B7C3A56-3005-D58D-0591-583C3F0365E8}"/>
+                <a16:creationId xmlns:a16="http://schemas.microsoft.com/office/drawing/2014/main" id="{03687CC1-6950-20A0-DB7D-6F18B53E527E}"/>
               </a:ext>
             </a:extLst>
           </p:cNvPr>
@@ -4544,7 +4547,7 @@
             <a:hlinkClick r:id="" action="ppaction://media"/>
             <a:extLst>
               <a:ext uri="{FF2B5EF4-FFF2-40B4-BE49-F238E27FC236}">
-                <a16:creationId xmlns:a16="http://schemas.microsoft.com/office/drawing/2014/main" id="{A62E790F-BA6E-54CB-57DB-8DA88BC6972E}"/>
+                <a16:creationId xmlns:a16="http://schemas.microsoft.com/office/drawing/2014/main" id="{FB239B09-2D36-0441-2A91-1874E9E48563}"/>
               </a:ext>
             </a:extLst>
           </p:cNvPr>
@@ -4579,7 +4582,7 @@
     </p:spTree>
     <p:extLst>
       <p:ext uri="{BB962C8B-B14F-4D97-AF65-F5344CB8AC3E}">
-        <p14:creationId xmlns:p14="http://schemas.microsoft.com/office/powerpoint/2010/main" val="2342336490"/>
+        <p14:creationId xmlns:p14="http://schemas.microsoft.com/office/powerpoint/2010/main" val="1334136294"/>
       </p:ext>
     </p:extLst>
   </p:cSld>
@@ -4703,7 +4706,7 @@
           <p:cNvPr id="2" name="テキスト ボックス 1">
             <a:extLst>
               <a:ext uri="{FF2B5EF4-FFF2-40B4-BE49-F238E27FC236}">
-                <a16:creationId xmlns:a16="http://schemas.microsoft.com/office/drawing/2014/main" id="{2CDFCAE9-087F-F34D-D2CD-824E98D726F7}"/>
+                <a16:creationId xmlns:a16="http://schemas.microsoft.com/office/drawing/2014/main" id="{8D68A663-933F-4247-8C86-314045986A74}"/>
               </a:ext>
             </a:extLst>
           </p:cNvPr>
@@ -4749,7 +4752,7 @@
           <p:cNvPr id="3" name="テキスト ボックス 2">
             <a:extLst>
               <a:ext uri="{FF2B5EF4-FFF2-40B4-BE49-F238E27FC236}">
-                <a16:creationId xmlns:a16="http://schemas.microsoft.com/office/drawing/2014/main" id="{AE2B1848-452B-7844-D7B5-2FF45AC09C20}"/>
+                <a16:creationId xmlns:a16="http://schemas.microsoft.com/office/drawing/2014/main" id="{F4C03910-C8B3-58D8-6863-D17A6A69D9BC}"/>
               </a:ext>
             </a:extLst>
           </p:cNvPr>
@@ -4789,7 +4792,7 @@
           <p:cNvPr id="4" name="テキスト ボックス 3">
             <a:extLst>
               <a:ext uri="{FF2B5EF4-FFF2-40B4-BE49-F238E27FC236}">
-                <a16:creationId xmlns:a16="http://schemas.microsoft.com/office/drawing/2014/main" id="{A587B58E-02CA-2257-8B77-02BDE283077C}"/>
+                <a16:creationId xmlns:a16="http://schemas.microsoft.com/office/drawing/2014/main" id="{291F5017-02C3-51DF-B932-E687C0D78B73}"/>
               </a:ext>
             </a:extLst>
           </p:cNvPr>
@@ -4899,7 +4902,7 @@
           <p:cNvPr id="5" name="テキスト ボックス 4">
             <a:extLst>
               <a:ext uri="{FF2B5EF4-FFF2-40B4-BE49-F238E27FC236}">
-                <a16:creationId xmlns:a16="http://schemas.microsoft.com/office/drawing/2014/main" id="{74A99B12-B65D-3C31-F55A-9272DD42B2CD}"/>
+                <a16:creationId xmlns:a16="http://schemas.microsoft.com/office/drawing/2014/main" id="{C6443EC4-B13F-E801-2EE6-DC262FE67864}"/>
               </a:ext>
             </a:extLst>
           </p:cNvPr>
@@ -4946,7 +4949,7 @@
             <a:hlinkClick r:id="" action="ppaction://media"/>
             <a:extLst>
               <a:ext uri="{FF2B5EF4-FFF2-40B4-BE49-F238E27FC236}">
-                <a16:creationId xmlns:a16="http://schemas.microsoft.com/office/drawing/2014/main" id="{57416150-5B07-439B-4B8A-159546FE2CB1}"/>
+                <a16:creationId xmlns:a16="http://schemas.microsoft.com/office/drawing/2014/main" id="{1FAE0D76-E45F-BEE6-CE06-0E0B87DB2BD4}"/>
               </a:ext>
             </a:extLst>
           </p:cNvPr>
@@ -4981,7 +4984,7 @@
     </p:spTree>
     <p:extLst>
       <p:ext uri="{BB962C8B-B14F-4D97-AF65-F5344CB8AC3E}">
-        <p14:creationId xmlns:p14="http://schemas.microsoft.com/office/powerpoint/2010/main" val="2633307631"/>
+        <p14:creationId xmlns:p14="http://schemas.microsoft.com/office/powerpoint/2010/main" val="3833487625"/>
       </p:ext>
     </p:extLst>
   </p:cSld>
@@ -5105,7 +5108,7 @@
           <p:cNvPr id="2" name="テキスト ボックス 1">
             <a:extLst>
               <a:ext uri="{FF2B5EF4-FFF2-40B4-BE49-F238E27FC236}">
-                <a16:creationId xmlns:a16="http://schemas.microsoft.com/office/drawing/2014/main" id="{B64F5018-9E0A-6B32-F288-1A573B7911EB}"/>
+                <a16:creationId xmlns:a16="http://schemas.microsoft.com/office/drawing/2014/main" id="{C9EC5B28-A16A-3B78-C250-610B693A9A60}"/>
               </a:ext>
             </a:extLst>
           </p:cNvPr>
@@ -5151,7 +5154,7 @@
           <p:cNvPr id="3" name="テキスト ボックス 2">
             <a:extLst>
               <a:ext uri="{FF2B5EF4-FFF2-40B4-BE49-F238E27FC236}">
-                <a16:creationId xmlns:a16="http://schemas.microsoft.com/office/drawing/2014/main" id="{5F94CAE8-5A9A-238A-7FD7-43E53799195C}"/>
+                <a16:creationId xmlns:a16="http://schemas.microsoft.com/office/drawing/2014/main" id="{6EF1E136-5120-D2AC-74CC-129FFF2621B6}"/>
               </a:ext>
             </a:extLst>
           </p:cNvPr>
@@ -5191,7 +5194,7 @@
           <p:cNvPr id="4" name="テキスト ボックス 3">
             <a:extLst>
               <a:ext uri="{FF2B5EF4-FFF2-40B4-BE49-F238E27FC236}">
-                <a16:creationId xmlns:a16="http://schemas.microsoft.com/office/drawing/2014/main" id="{2B56074E-5735-FA7C-B64F-088AB9B9F35B}"/>
+                <a16:creationId xmlns:a16="http://schemas.microsoft.com/office/drawing/2014/main" id="{F703A336-0573-8DCF-B343-4B4A2A160915}"/>
               </a:ext>
             </a:extLst>
           </p:cNvPr>
@@ -5221,25 +5224,7 @@
                 </a:solidFill>
                 <a:latin typeface="Arial" panose="020B0604020202020204" pitchFamily="34" charset="0"/>
               </a:rPr>
-              <a:t>引越し業者相見積もり口コミサイト＋</a:t>
-            </a:r>
-            <a:r>
-              <a:rPr kumimoji="1" lang="en-US" altLang="ja-JP" sz="2000">
-                <a:solidFill>
-                  <a:srgbClr val="333333"/>
-                </a:solidFill>
-                <a:latin typeface="Arial" panose="020B0604020202020204" pitchFamily="34" charset="0"/>
-              </a:rPr>
-              <a:t>LINE</a:t>
-            </a:r>
-            <a:r>
-              <a:rPr kumimoji="1" lang="ja-JP" altLang="en-US" sz="2000">
-                <a:solidFill>
-                  <a:srgbClr val="333333"/>
-                </a:solidFill>
-                <a:latin typeface="Arial" panose="020B0604020202020204" pitchFamily="34" charset="0"/>
-              </a:rPr>
-              <a:t>通知を新規構築</a:t>
+              <a:t>直近のコミットでは、実装の見直しと継続的な改善が行われました。</a:t>
             </a:r>
           </a:p>
         </p:txBody>
@@ -5249,7 +5234,7 @@
           <p:cNvPr id="5" name="テキスト ボックス 4">
             <a:extLst>
               <a:ext uri="{FF2B5EF4-FFF2-40B4-BE49-F238E27FC236}">
-                <a16:creationId xmlns:a16="http://schemas.microsoft.com/office/drawing/2014/main" id="{A9BEDBBF-32ED-D511-D78F-A495CA2B2044}"/>
+                <a16:creationId xmlns:a16="http://schemas.microsoft.com/office/drawing/2014/main" id="{A39CD373-6743-7D26-F55D-071B23D91586}"/>
               </a:ext>
             </a:extLst>
           </p:cNvPr>
@@ -5296,7 +5281,7 @@
             <a:hlinkClick r:id="" action="ppaction://media"/>
             <a:extLst>
               <a:ext uri="{FF2B5EF4-FFF2-40B4-BE49-F238E27FC236}">
-                <a16:creationId xmlns:a16="http://schemas.microsoft.com/office/drawing/2014/main" id="{85B9BA0D-D80E-BC16-9AE6-1A7F0AE665E4}"/>
+                <a16:creationId xmlns:a16="http://schemas.microsoft.com/office/drawing/2014/main" id="{49B5102B-539A-A142-E10E-8EA1E0E6D0DD}"/>
               </a:ext>
             </a:extLst>
           </p:cNvPr>
@@ -5331,7 +5316,7 @@
     </p:spTree>
     <p:extLst>
       <p:ext uri="{BB962C8B-B14F-4D97-AF65-F5344CB8AC3E}">
-        <p14:creationId xmlns:p14="http://schemas.microsoft.com/office/powerpoint/2010/main" val="322172836"/>
+        <p14:creationId xmlns:p14="http://schemas.microsoft.com/office/powerpoint/2010/main" val="775825216"/>
       </p:ext>
     </p:extLst>
   </p:cSld>
@@ -5340,10 +5325,10 @@
   </p:clrMapOvr>
   <mc:AlternateContent xmlns:mc="http://schemas.openxmlformats.org/markup-compatibility/2006">
     <mc:Choice xmlns:p14="http://schemas.microsoft.com/office/powerpoint/2010/main" Requires="p14">
-      <p:transition spd="slow" p14:dur="2000" advTm="9000"/>
+      <p:transition spd="slow" p14:dur="2000" advTm="7000"/>
     </mc:Choice>
     <mc:Fallback>
-      <p:transition spd="slow" advTm="9000"/>
+      <p:transition spd="slow" advTm="7000"/>
     </mc:Fallback>
   </mc:AlternateContent>
   <p:timing>
@@ -5374,7 +5359,7 @@
                                   <p:childTnLst>
                                     <p:cmd type="call" cmd="playFrom(0.0)">
                                       <p:cBhvr>
-                                        <p:cTn id="6" dur="8795" fill="hold"/>
+                                        <p:cTn id="6" dur="6076" fill="hold"/>
                                         <p:tgtEl>
                                           <p:spTgt spid="6"/>
                                         </p:tgtEl>
@@ -5455,7 +5440,7 @@
           <p:cNvPr id="2" name="テキスト ボックス 1">
             <a:extLst>
               <a:ext uri="{FF2B5EF4-FFF2-40B4-BE49-F238E27FC236}">
-                <a16:creationId xmlns:a16="http://schemas.microsoft.com/office/drawing/2014/main" id="{54253350-C146-63D0-1D60-C28D35E8FDC9}"/>
+                <a16:creationId xmlns:a16="http://schemas.microsoft.com/office/drawing/2014/main" id="{16401E84-E716-D141-5FAE-B36A6732564B}"/>
               </a:ext>
             </a:extLst>
           </p:cNvPr>
@@ -5501,7 +5486,7 @@
           <p:cNvPr id="3" name="テキスト ボックス 2">
             <a:extLst>
               <a:ext uri="{FF2B5EF4-FFF2-40B4-BE49-F238E27FC236}">
-                <a16:creationId xmlns:a16="http://schemas.microsoft.com/office/drawing/2014/main" id="{7F51FB23-0CC5-A314-0FE9-694DC13EDFFA}"/>
+                <a16:creationId xmlns:a16="http://schemas.microsoft.com/office/drawing/2014/main" id="{36AEAD5E-FBD7-D6EA-5A8C-920C7E533F18}"/>
               </a:ext>
             </a:extLst>
           </p:cNvPr>
@@ -5541,7 +5526,7 @@
           <p:cNvPr id="4" name="テキスト ボックス 3">
             <a:extLst>
               <a:ext uri="{FF2B5EF4-FFF2-40B4-BE49-F238E27FC236}">
-                <a16:creationId xmlns:a16="http://schemas.microsoft.com/office/drawing/2014/main" id="{4E073713-6618-62CC-6522-BFF8B9A29F1D}"/>
+                <a16:creationId xmlns:a16="http://schemas.microsoft.com/office/drawing/2014/main" id="{AEE1181E-7EDD-2F6D-B1C8-A5F403F32764}"/>
               </a:ext>
             </a:extLst>
           </p:cNvPr>
@@ -5606,7 +5591,7 @@
           <p:cNvPr id="5" name="テキスト ボックス 4">
             <a:extLst>
               <a:ext uri="{FF2B5EF4-FFF2-40B4-BE49-F238E27FC236}">
-                <a16:creationId xmlns:a16="http://schemas.microsoft.com/office/drawing/2014/main" id="{0A9CBD23-B53C-17A3-3777-DD29F58CC499}"/>
+                <a16:creationId xmlns:a16="http://schemas.microsoft.com/office/drawing/2014/main" id="{B5863492-8927-5E67-ACA7-4C6978CCE6C6}"/>
               </a:ext>
             </a:extLst>
           </p:cNvPr>
@@ -5653,7 +5638,7 @@
             <a:hlinkClick r:id="" action="ppaction://media"/>
             <a:extLst>
               <a:ext uri="{FF2B5EF4-FFF2-40B4-BE49-F238E27FC236}">
-                <a16:creationId xmlns:a16="http://schemas.microsoft.com/office/drawing/2014/main" id="{B4B1F0E2-D66D-469D-7A96-D66C2AFD4B56}"/>
+                <a16:creationId xmlns:a16="http://schemas.microsoft.com/office/drawing/2014/main" id="{151BAF0B-B478-16A5-9CA8-967BAA344323}"/>
               </a:ext>
             </a:extLst>
           </p:cNvPr>
@@ -5688,7 +5673,7 @@
     </p:spTree>
     <p:extLst>
       <p:ext uri="{BB962C8B-B14F-4D97-AF65-F5344CB8AC3E}">
-        <p14:creationId xmlns:p14="http://schemas.microsoft.com/office/powerpoint/2010/main" val="2127097793"/>
+        <p14:creationId xmlns:p14="http://schemas.microsoft.com/office/powerpoint/2010/main" val="487821347"/>
       </p:ext>
     </p:extLst>
   </p:cSld>
